--- a/KVM/Präsentation/KVM_MissverständnisseTexten.pptx
+++ b/KVM/Präsentation/KVM_MissverständnisseTexten.pptx
@@ -5,15 +5,14 @@
     <p:sldMasterId id="2147483735" r:id="rId1"/>
   </p:sldMasterIdLst>
   <p:notesMasterIdLst>
-    <p:notesMasterId r:id="rId8"/>
+    <p:notesMasterId r:id="rId7"/>
   </p:notesMasterIdLst>
   <p:sldIdLst>
     <p:sldId id="302" r:id="rId2"/>
-    <p:sldId id="315" r:id="rId3"/>
-    <p:sldId id="314" r:id="rId4"/>
-    <p:sldId id="318" r:id="rId5"/>
-    <p:sldId id="319" r:id="rId6"/>
-    <p:sldId id="308" r:id="rId7"/>
+    <p:sldId id="314" r:id="rId3"/>
+    <p:sldId id="318" r:id="rId4"/>
+    <p:sldId id="319" r:id="rId5"/>
+    <p:sldId id="308" r:id="rId6"/>
   </p:sldIdLst>
   <p:sldSz cx="12192000" cy="6858000"/>
   <p:notesSz cx="6858000" cy="9144000"/>
@@ -538,6 +537,16 @@
           <a:bodyPr/>
           <a:lstStyle/>
           <a:p>
+            <a:r>
+              <a:rPr lang="de-DE"/>
+              <a:t>Erster punkt gleich sichtbar</a:t>
+            </a:r>
+          </a:p>
+          <a:p>
+            <a:r>
+              <a:rPr lang="de-DE"/>
+              <a:t>Verschiedene kommunikationsstile</a:t>
+            </a:r>
             <a:endParaRPr lang="en-US"/>
           </a:p>
         </p:txBody>
@@ -585,121 +594,6 @@
 </file>
 
 <file path=ppt/notesSlides/notesSlide2.xml><?xml version="1.0" encoding="utf-8"?>
-<p:notes xmlns:a="http://schemas.openxmlformats.org/drawingml/2006/main" xmlns:r="http://schemas.openxmlformats.org/officeDocument/2006/relationships" xmlns:p="http://schemas.openxmlformats.org/presentationml/2006/main">
-  <p:cSld>
-    <p:spTree>
-      <p:nvGrpSpPr>
-        <p:cNvPr id="1" name="">
-          <a:extLst>
-            <a:ext uri="{FF2B5EF4-FFF2-40B4-BE49-F238E27FC236}">
-              <a16:creationId xmlns:a16="http://schemas.microsoft.com/office/drawing/2014/main" id="{EBF62594-422A-5312-D9A7-5B12431A7AE9}"/>
-            </a:ext>
-          </a:extLst>
-        </p:cNvPr>
-        <p:cNvGrpSpPr/>
-        <p:nvPr/>
-      </p:nvGrpSpPr>
-      <p:grpSpPr>
-        <a:xfrm>
-          <a:off x="0" y="0"/>
-          <a:ext cx="0" cy="0"/>
-          <a:chOff x="0" y="0"/>
-          <a:chExt cx="0" cy="0"/>
-        </a:xfrm>
-      </p:grpSpPr>
-      <p:sp>
-        <p:nvSpPr>
-          <p:cNvPr id="2" name="Slide Image Placeholder 1">
-            <a:extLst>
-              <a:ext uri="{FF2B5EF4-FFF2-40B4-BE49-F238E27FC236}">
-                <a16:creationId xmlns:a16="http://schemas.microsoft.com/office/drawing/2014/main" id="{6684FC12-680B-E71F-89B2-FB8FA952E94B}"/>
-              </a:ext>
-            </a:extLst>
-          </p:cNvPr>
-          <p:cNvSpPr>
-            <a:spLocks noGrp="1" noRot="1" noChangeAspect="1"/>
-          </p:cNvSpPr>
-          <p:nvPr>
-            <p:ph type="sldImg"/>
-          </p:nvPr>
-        </p:nvSpPr>
-        <p:spPr/>
-        <p:txBody>
-          <a:bodyPr/>
-          <a:lstStyle/>
-          <a:p>
-            <a:endParaRPr lang="en-US"/>
-          </a:p>
-        </p:txBody>
-      </p:sp>
-      <p:sp>
-        <p:nvSpPr>
-          <p:cNvPr id="3" name="Notes Placeholder 2">
-            <a:extLst>
-              <a:ext uri="{FF2B5EF4-FFF2-40B4-BE49-F238E27FC236}">
-                <a16:creationId xmlns:a16="http://schemas.microsoft.com/office/drawing/2014/main" id="{02B349AB-A1C2-6C9E-A4C2-0F8C22859169}"/>
-              </a:ext>
-            </a:extLst>
-          </p:cNvPr>
-          <p:cNvSpPr>
-            <a:spLocks noGrp="1"/>
-          </p:cNvSpPr>
-          <p:nvPr>
-            <p:ph type="body" idx="1"/>
-          </p:nvPr>
-        </p:nvSpPr>
-        <p:spPr/>
-        <p:txBody>
-          <a:bodyPr/>
-          <a:lstStyle/>
-          <a:p>
-            <a:endParaRPr lang="en-US"/>
-          </a:p>
-        </p:txBody>
-      </p:sp>
-      <p:sp>
-        <p:nvSpPr>
-          <p:cNvPr id="4" name="Slide Number Placeholder 3">
-            <a:extLst>
-              <a:ext uri="{FF2B5EF4-FFF2-40B4-BE49-F238E27FC236}">
-                <a16:creationId xmlns:a16="http://schemas.microsoft.com/office/drawing/2014/main" id="{6DEC8BE2-C077-A1CC-6938-08658E6130E7}"/>
-              </a:ext>
-            </a:extLst>
-          </p:cNvPr>
-          <p:cNvSpPr>
-            <a:spLocks noGrp="1"/>
-          </p:cNvSpPr>
-          <p:nvPr>
-            <p:ph type="sldNum" sz="quarter" idx="5"/>
-          </p:nvPr>
-        </p:nvSpPr>
-        <p:spPr/>
-        <p:txBody>
-          <a:bodyPr/>
-          <a:lstStyle/>
-          <a:p>
-            <a:fld id="{60D61062-E9D8-4DAB-8118-1CF0D558F973}" type="slidenum">
-              <a:rPr lang="en-US" smtClean="0"/>
-              <a:t>2</a:t>
-            </a:fld>
-            <a:endParaRPr lang="en-US"/>
-          </a:p>
-        </p:txBody>
-      </p:sp>
-    </p:spTree>
-    <p:extLst>
-      <p:ext uri="{BB962C8B-B14F-4D97-AF65-F5344CB8AC3E}">
-        <p14:creationId xmlns:p14="http://schemas.microsoft.com/office/powerpoint/2010/main" val="727625453"/>
-      </p:ext>
-    </p:extLst>
-  </p:cSld>
-  <p:clrMapOvr>
-    <a:masterClrMapping/>
-  </p:clrMapOvr>
-</p:notes>
-</file>
-
-<file path=ppt/notesSlides/notesSlide3.xml><?xml version="1.0" encoding="utf-8"?>
 <p:notes xmlns:a="http://schemas.openxmlformats.org/drawingml/2006/main" xmlns:r="http://schemas.openxmlformats.org/officeDocument/2006/relationships" xmlns:p="http://schemas.openxmlformats.org/presentationml/2006/main">
   <p:cSld>
     <p:spTree>
@@ -795,7 +689,7 @@
           <a:p>
             <a:fld id="{60D61062-E9D8-4DAB-8118-1CF0D558F973}" type="slidenum">
               <a:rPr lang="en-US" smtClean="0"/>
-              <a:t>3</a:t>
+              <a:t>2</a:t>
             </a:fld>
             <a:endParaRPr lang="en-US"/>
           </a:p>
@@ -814,7 +708,7 @@
 </p:notes>
 </file>
 
-<file path=ppt/notesSlides/notesSlide4.xml><?xml version="1.0" encoding="utf-8"?>
+<file path=ppt/notesSlides/notesSlide3.xml><?xml version="1.0" encoding="utf-8"?>
 <p:notes xmlns:a="http://schemas.openxmlformats.org/drawingml/2006/main" xmlns:r="http://schemas.openxmlformats.org/officeDocument/2006/relationships" xmlns:p="http://schemas.openxmlformats.org/presentationml/2006/main">
   <p:cSld>
     <p:spTree>
@@ -910,7 +804,7 @@
           <a:p>
             <a:fld id="{60D61062-E9D8-4DAB-8118-1CF0D558F973}" type="slidenum">
               <a:rPr lang="en-US" smtClean="0"/>
-              <a:t>4</a:t>
+              <a:t>3</a:t>
             </a:fld>
             <a:endParaRPr lang="en-US"/>
           </a:p>
@@ -929,7 +823,7 @@
 </p:notes>
 </file>
 
-<file path=ppt/notesSlides/notesSlide5.xml><?xml version="1.0" encoding="utf-8"?>
+<file path=ppt/notesSlides/notesSlide4.xml><?xml version="1.0" encoding="utf-8"?>
 <p:notes xmlns:a="http://schemas.openxmlformats.org/drawingml/2006/main" xmlns:r="http://schemas.openxmlformats.org/officeDocument/2006/relationships" xmlns:p="http://schemas.openxmlformats.org/presentationml/2006/main">
   <p:cSld>
     <p:spTree>
@@ -1025,7 +919,7 @@
           <a:p>
             <a:fld id="{60D61062-E9D8-4DAB-8118-1CF0D558F973}" type="slidenum">
               <a:rPr lang="en-US" smtClean="0"/>
-              <a:t>5</a:t>
+              <a:t>4</a:t>
             </a:fld>
             <a:endParaRPr lang="en-US"/>
           </a:p>
@@ -1044,7 +938,7 @@
 </p:notes>
 </file>
 
-<file path=ppt/notesSlides/notesSlide6.xml><?xml version="1.0" encoding="utf-8"?>
+<file path=ppt/notesSlides/notesSlide5.xml><?xml version="1.0" encoding="utf-8"?>
 <p:notes xmlns:a="http://schemas.openxmlformats.org/drawingml/2006/main" xmlns:r="http://schemas.openxmlformats.org/officeDocument/2006/relationships" xmlns:p="http://schemas.openxmlformats.org/presentationml/2006/main">
   <p:cSld>
     <p:spTree>
@@ -1140,7 +1034,7 @@
           <a:p>
             <a:fld id="{60D61062-E9D8-4DAB-8118-1CF0D558F973}" type="slidenum">
               <a:rPr lang="en-US" smtClean="0"/>
-              <a:t>6</a:t>
+              <a:t>5</a:t>
             </a:fld>
             <a:endParaRPr lang="en-US"/>
           </a:p>
@@ -6807,9 +6701,9 @@
         <p:grpSpPr>
           <a:xfrm>
             <a:off x="584026" y="1088129"/>
-            <a:ext cx="4372022" cy="841685"/>
+            <a:ext cx="4500930" cy="841685"/>
             <a:chOff x="888826" y="4371483"/>
-            <a:chExt cx="3495408" cy="841685"/>
+            <a:chExt cx="3598469" cy="841685"/>
           </a:xfrm>
           <a:solidFill>
             <a:srgbClr val="46B1E6"/>
@@ -6884,7 +6778,7 @@
           <p:spPr>
             <a:xfrm>
               <a:off x="1164784" y="4371746"/>
-              <a:ext cx="3219450" cy="841422"/>
+              <a:ext cx="3322511" cy="841422"/>
             </a:xfrm>
             <a:prstGeom prst="roundRect">
               <a:avLst/>
@@ -7056,10 +6950,10 @@
         </p:nvGrpSpPr>
         <p:grpSpPr>
           <a:xfrm flipH="1">
-            <a:off x="10268711" y="1958345"/>
-            <a:ext cx="1270685" cy="565371"/>
-            <a:chOff x="881206" y="4365909"/>
-            <a:chExt cx="1080829" cy="565371"/>
+            <a:off x="10268711" y="1964182"/>
+            <a:ext cx="1270685" cy="559534"/>
+            <a:chOff x="881206" y="4371746"/>
+            <a:chExt cx="1080829" cy="559534"/>
           </a:xfrm>
           <a:solidFill>
             <a:srgbClr val="8664B0"/>
@@ -7081,7 +6975,7 @@
           </p:nvSpPr>
           <p:spPr>
             <a:xfrm flipH="1" flipV="1">
-              <a:off x="881206" y="4365909"/>
+              <a:off x="881206" y="4375848"/>
               <a:ext cx="419100" cy="310327"/>
             </a:xfrm>
             <a:prstGeom prst="rtTriangle">
@@ -7190,9 +7084,9 @@
         <p:grpSpPr>
           <a:xfrm>
             <a:off x="584026" y="2643645"/>
-            <a:ext cx="2780966" cy="507913"/>
+            <a:ext cx="2884002" cy="507913"/>
             <a:chOff x="888826" y="4371483"/>
-            <a:chExt cx="2223367" cy="507913"/>
+            <a:chExt cx="2305744" cy="507913"/>
           </a:xfrm>
           <a:solidFill>
             <a:srgbClr val="46B1E6"/>
@@ -7267,7 +7161,7 @@
           <p:spPr>
             <a:xfrm>
               <a:off x="1164784" y="4371746"/>
-              <a:ext cx="1947409" cy="507650"/>
+              <a:ext cx="2029786" cy="507650"/>
             </a:xfrm>
             <a:prstGeom prst="roundRect">
               <a:avLst/>
@@ -7324,9 +7218,9 @@
         </p:nvGrpSpPr>
         <p:grpSpPr>
           <a:xfrm flipH="1">
-            <a:off x="7978820" y="4637292"/>
+            <a:off x="7978820" y="4627353"/>
             <a:ext cx="3565829" cy="559534"/>
-            <a:chOff x="881206" y="4371746"/>
+            <a:chOff x="881206" y="4361807"/>
             <a:chExt cx="3033050" cy="559534"/>
           </a:xfrm>
           <a:solidFill>
@@ -7349,7 +7243,7 @@
           </p:nvSpPr>
           <p:spPr>
             <a:xfrm flipH="1" flipV="1">
-              <a:off x="881206" y="4375434"/>
+              <a:off x="881206" y="4365495"/>
               <a:ext cx="419100" cy="310327"/>
             </a:xfrm>
             <a:prstGeom prst="rtTriangle">
@@ -7401,7 +7295,7 @@
           </p:nvSpPr>
           <p:spPr>
             <a:xfrm>
-              <a:off x="1164787" y="4371746"/>
+              <a:off x="1164787" y="4361807"/>
               <a:ext cx="2749469" cy="559534"/>
             </a:xfrm>
             <a:prstGeom prst="roundRect">
@@ -7437,7 +7331,7 @@
                   <a:latin typeface="Roboto" panose="02000000000000000000" pitchFamily="2" charset="0"/>
                   <a:ea typeface="Roboto" panose="02000000000000000000" pitchFamily="2" charset="0"/>
                 </a:rPr>
-                <a:t> ich hab doch okay gesagt?</a:t>
+                <a:t>  ich hab doch okay gesagt?</a:t>
               </a:r>
             </a:p>
           </p:txBody>
@@ -7458,9 +7352,9 @@
         <p:grpSpPr>
           <a:xfrm>
             <a:off x="584026" y="5274891"/>
-            <a:ext cx="2397300" cy="472187"/>
+            <a:ext cx="2616373" cy="472187"/>
             <a:chOff x="888826" y="4371483"/>
-            <a:chExt cx="1916629" cy="472187"/>
+            <a:chExt cx="2091777" cy="472187"/>
           </a:xfrm>
           <a:solidFill>
             <a:srgbClr val="46B1E6"/>
@@ -7534,8 +7428,8 @@
           </p:nvSpPr>
           <p:spPr>
             <a:xfrm>
-              <a:off x="1164786" y="4371746"/>
-              <a:ext cx="1640669" cy="471924"/>
+              <a:off x="1164785" y="4371746"/>
+              <a:ext cx="1815818" cy="471924"/>
             </a:xfrm>
             <a:prstGeom prst="roundRect">
               <a:avLst/>
@@ -7572,7 +7466,7 @@
                   <a:latin typeface="Roboto" panose="02000000000000000000" pitchFamily="2" charset="0"/>
                   <a:ea typeface="Roboto" panose="02000000000000000000" pitchFamily="2" charset="0"/>
                 </a:rPr>
-                <a:t> ne, passt schon</a:t>
+                <a:t> neee, passt schon</a:t>
               </a:r>
             </a:p>
           </p:txBody>
@@ -7593,9 +7487,9 @@
         <p:grpSpPr>
           <a:xfrm>
             <a:off x="584026" y="3384970"/>
-            <a:ext cx="3466766" cy="507913"/>
+            <a:ext cx="3898764" cy="507913"/>
             <a:chOff x="888826" y="4371483"/>
-            <a:chExt cx="2771660" cy="507913"/>
+            <a:chExt cx="3117040" cy="507913"/>
           </a:xfrm>
           <a:solidFill>
             <a:srgbClr val="46B1E6"/>
@@ -7670,7 +7564,7 @@
           <p:spPr>
             <a:xfrm>
               <a:off x="1164784" y="4371746"/>
-              <a:ext cx="2495702" cy="507650"/>
+              <a:ext cx="2841082" cy="507650"/>
             </a:xfrm>
             <a:prstGeom prst="roundRect">
               <a:avLst/>
@@ -7707,7 +7601,7 @@
                   <a:latin typeface="Roboto" panose="02000000000000000000" pitchFamily="2" charset="0"/>
                   <a:ea typeface="Roboto" panose="02000000000000000000" pitchFamily="2" charset="0"/>
                 </a:rPr>
-                <a:t> musst dich nich zwingen </a:t>
+                <a:t> du musst dich nich zwingen </a:t>
               </a:r>
               <a:r>
                 <a:rPr lang="en-US">
@@ -7893,10 +7787,10 @@
         </p:nvGrpSpPr>
         <p:grpSpPr>
           <a:xfrm flipH="1">
-            <a:off x="10529643" y="3874670"/>
-            <a:ext cx="1009753" cy="559534"/>
-            <a:chOff x="881206" y="4371746"/>
-            <a:chExt cx="858883" cy="559534"/>
+            <a:off x="10515601" y="3864731"/>
+            <a:ext cx="1023795" cy="559534"/>
+            <a:chOff x="881206" y="4361807"/>
+            <a:chExt cx="870827" cy="559534"/>
           </a:xfrm>
           <a:solidFill>
             <a:srgbClr val="8664B0"/>
@@ -7918,7 +7812,7 @@
           </p:nvSpPr>
           <p:spPr>
             <a:xfrm flipH="1" flipV="1">
-              <a:off x="881206" y="4374701"/>
+              <a:off x="881206" y="4364762"/>
               <a:ext cx="419100" cy="310327"/>
             </a:xfrm>
             <a:prstGeom prst="rtTriangle">
@@ -7970,8 +7864,8 @@
           </p:nvSpPr>
           <p:spPr>
             <a:xfrm>
-              <a:off x="1164788" y="4371746"/>
-              <a:ext cx="575301" cy="559534"/>
+              <a:off x="1164788" y="4361807"/>
+              <a:ext cx="587245" cy="559534"/>
             </a:xfrm>
             <a:prstGeom prst="roundRect">
               <a:avLst/>
@@ -8006,7 +7900,7 @@
                   <a:latin typeface="Roboto" panose="02000000000000000000" pitchFamily="2" charset="0"/>
                   <a:ea typeface="Roboto" panose="02000000000000000000" pitchFamily="2" charset="0"/>
                 </a:rPr>
-                <a:t> ?</a:t>
+                <a:t>  ?</a:t>
               </a:r>
             </a:p>
           </p:txBody>
@@ -8792,1074 +8686,6 @@
         <p:cNvPr id="1" name="">
           <a:extLst>
             <a:ext uri="{FF2B5EF4-FFF2-40B4-BE49-F238E27FC236}">
-              <a16:creationId xmlns:a16="http://schemas.microsoft.com/office/drawing/2014/main" id="{0DA0EABE-9886-8F3B-E78B-12D70C6C6ECF}"/>
-            </a:ext>
-          </a:extLst>
-        </p:cNvPr>
-        <p:cNvGrpSpPr/>
-        <p:nvPr/>
-      </p:nvGrpSpPr>
-      <p:grpSpPr>
-        <a:xfrm>
-          <a:off x="0" y="0"/>
-          <a:ext cx="0" cy="0"/>
-          <a:chOff x="0" y="0"/>
-          <a:chExt cx="0" cy="0"/>
-        </a:xfrm>
-      </p:grpSpPr>
-      <p:sp>
-        <p:nvSpPr>
-          <p:cNvPr id="2" name="Rectangle 1">
-            <a:extLst>
-              <a:ext uri="{FF2B5EF4-FFF2-40B4-BE49-F238E27FC236}">
-                <a16:creationId xmlns:a16="http://schemas.microsoft.com/office/drawing/2014/main" id="{6CD67648-AAB8-F5C3-0673-F496AB121B06}"/>
-              </a:ext>
-            </a:extLst>
-          </p:cNvPr>
-          <p:cNvSpPr>
-            <a:spLocks noGrp="1" noRot="1" noMove="1" noResize="1" noEditPoints="1" noAdjustHandles="1" noChangeArrowheads="1" noChangeShapeType="1"/>
-          </p:cNvSpPr>
-          <p:nvPr/>
-        </p:nvSpPr>
-        <p:spPr>
-          <a:xfrm>
-            <a:off x="0" y="0"/>
-            <a:ext cx="12192000" cy="6858000"/>
-          </a:xfrm>
-          <a:prstGeom prst="rect">
-            <a:avLst/>
-          </a:prstGeom>
-          <a:pattFill prst="wdUpDiag">
-            <a:fgClr>
-              <a:srgbClr val="212121"/>
-            </a:fgClr>
-            <a:bgClr>
-              <a:schemeClr val="bg1"/>
-            </a:bgClr>
-          </a:pattFill>
-          <a:ln>
-            <a:solidFill>
-              <a:srgbClr val="212121"/>
-            </a:solidFill>
-          </a:ln>
-        </p:spPr>
-        <p:style>
-          <a:lnRef idx="2">
-            <a:schemeClr val="dk1">
-              <a:shade val="15000"/>
-            </a:schemeClr>
-          </a:lnRef>
-          <a:fillRef idx="1">
-            <a:schemeClr val="dk1"/>
-          </a:fillRef>
-          <a:effectRef idx="0">
-            <a:schemeClr val="dk1"/>
-          </a:effectRef>
-          <a:fontRef idx="minor">
-            <a:schemeClr val="lt1"/>
-          </a:fontRef>
-        </p:style>
-        <p:txBody>
-          <a:bodyPr rtlCol="0" anchor="ctr"/>
-          <a:lstStyle/>
-          <a:p>
-            <a:pPr algn="ctr"/>
-            <a:endParaRPr lang="en-US"/>
-          </a:p>
-        </p:txBody>
-      </p:sp>
-      <p:grpSp>
-        <p:nvGrpSpPr>
-          <p:cNvPr id="12" name="Group 11">
-            <a:extLst>
-              <a:ext uri="{FF2B5EF4-FFF2-40B4-BE49-F238E27FC236}">
-                <a16:creationId xmlns:a16="http://schemas.microsoft.com/office/drawing/2014/main" id="{AD43F342-020D-ACAF-112D-FDE78057B101}"/>
-              </a:ext>
-            </a:extLst>
-          </p:cNvPr>
-          <p:cNvGrpSpPr/>
-          <p:nvPr/>
-        </p:nvGrpSpPr>
-        <p:grpSpPr>
-          <a:xfrm flipH="1">
-            <a:off x="9944089" y="2116110"/>
-            <a:ext cx="1387649" cy="601903"/>
-            <a:chOff x="850726" y="852150"/>
-            <a:chExt cx="1387649" cy="601903"/>
-          </a:xfrm>
-          <a:solidFill>
-            <a:srgbClr val="8664B0"/>
-          </a:solidFill>
-        </p:grpSpPr>
-        <p:sp>
-          <p:nvSpPr>
-            <p:cNvPr id="4" name="Right Triangle 3">
-              <a:extLst>
-                <a:ext uri="{FF2B5EF4-FFF2-40B4-BE49-F238E27FC236}">
-                  <a16:creationId xmlns:a16="http://schemas.microsoft.com/office/drawing/2014/main" id="{0A27AA9A-BC53-C98C-5C94-3922D249B844}"/>
-                </a:ext>
-              </a:extLst>
-            </p:cNvPr>
-            <p:cNvSpPr>
-              <a:spLocks noChangeAspect="1"/>
-            </p:cNvSpPr>
-            <p:nvPr/>
-          </p:nvSpPr>
-          <p:spPr>
-            <a:xfrm flipH="1" flipV="1">
-              <a:off x="850726" y="852150"/>
-              <a:ext cx="419100" cy="310327"/>
-            </a:xfrm>
-            <a:prstGeom prst="rtTriangle">
-              <a:avLst/>
-            </a:prstGeom>
-            <a:grpFill/>
-            <a:ln>
-              <a:noFill/>
-            </a:ln>
-          </p:spPr>
-          <p:style>
-            <a:lnRef idx="2">
-              <a:schemeClr val="accent1">
-                <a:shade val="15000"/>
-              </a:schemeClr>
-            </a:lnRef>
-            <a:fillRef idx="1">
-              <a:schemeClr val="accent1"/>
-            </a:fillRef>
-            <a:effectRef idx="0">
-              <a:schemeClr val="accent1"/>
-            </a:effectRef>
-            <a:fontRef idx="minor">
-              <a:schemeClr val="lt1"/>
-            </a:fontRef>
-          </p:style>
-          <p:txBody>
-            <a:bodyPr rtlCol="0" anchor="ctr"/>
-            <a:lstStyle/>
-            <a:p>
-              <a:pPr algn="ctr"/>
-              <a:endParaRPr lang="en-US"/>
-            </a:p>
-          </p:txBody>
-        </p:sp>
-        <p:sp>
-          <p:nvSpPr>
-            <p:cNvPr id="5" name="Rectangle: Rounded Corners 4">
-              <a:extLst>
-                <a:ext uri="{FF2B5EF4-FFF2-40B4-BE49-F238E27FC236}">
-                  <a16:creationId xmlns:a16="http://schemas.microsoft.com/office/drawing/2014/main" id="{449EED43-519F-A2F1-CEAF-D6E90F35DD3F}"/>
-                </a:ext>
-              </a:extLst>
-            </p:cNvPr>
-            <p:cNvSpPr>
-              <a:spLocks/>
-            </p:cNvSpPr>
-            <p:nvPr/>
-          </p:nvSpPr>
-          <p:spPr>
-            <a:xfrm>
-              <a:off x="1126684" y="852413"/>
-              <a:ext cx="1111691" cy="601640"/>
-            </a:xfrm>
-            <a:prstGeom prst="roundRect">
-              <a:avLst/>
-            </a:prstGeom>
-            <a:grpFill/>
-            <a:ln>
-              <a:noFill/>
-            </a:ln>
-          </p:spPr>
-          <p:style>
-            <a:lnRef idx="2">
-              <a:schemeClr val="accent1">
-                <a:shade val="15000"/>
-              </a:schemeClr>
-            </a:lnRef>
-            <a:fillRef idx="1">
-              <a:schemeClr val="accent1"/>
-            </a:fillRef>
-            <a:effectRef idx="0">
-              <a:schemeClr val="accent1"/>
-            </a:effectRef>
-            <a:fontRef idx="minor">
-              <a:schemeClr val="lt1"/>
-            </a:fontRef>
-          </p:style>
-          <p:txBody>
-            <a:bodyPr rtlCol="0" anchor="ctr"/>
-            <a:lstStyle/>
-            <a:p>
-              <a:r>
-                <a:rPr lang="en-US" sz="2000">
-                  <a:latin typeface="Roboto" panose="02000000000000000000" pitchFamily="2" charset="0"/>
-                  <a:ea typeface="Roboto" panose="02000000000000000000" pitchFamily="2" charset="0"/>
-                </a:rPr>
-                <a:t>  hey </a:t>
-              </a:r>
-              <a:r>
-                <a:rPr lang="en-US" sz="2000">
-                  <a:latin typeface="Roboto" panose="02000000000000000000" pitchFamily="2" charset="0"/>
-                  <a:ea typeface="Roboto" panose="02000000000000000000" pitchFamily="2" charset="0"/>
-                  <a:sym typeface="Wingdings" panose="05000000000000000000" pitchFamily="2" charset="2"/>
-                </a:rPr>
-                <a:t></a:t>
-              </a:r>
-              <a:endParaRPr lang="en-US" sz="2000">
-                <a:latin typeface="Roboto" panose="02000000000000000000" pitchFamily="2" charset="0"/>
-                <a:ea typeface="Roboto" panose="02000000000000000000" pitchFamily="2" charset="0"/>
-              </a:endParaRPr>
-            </a:p>
-          </p:txBody>
-        </p:sp>
-      </p:grpSp>
-      <p:grpSp>
-        <p:nvGrpSpPr>
-          <p:cNvPr id="14" name="Group 13">
-            <a:extLst>
-              <a:ext uri="{FF2B5EF4-FFF2-40B4-BE49-F238E27FC236}">
-                <a16:creationId xmlns:a16="http://schemas.microsoft.com/office/drawing/2014/main" id="{5001658E-42BB-9074-7C35-14C43F26F024}"/>
-              </a:ext>
-            </a:extLst>
-          </p:cNvPr>
-          <p:cNvGrpSpPr/>
-          <p:nvPr/>
-        </p:nvGrpSpPr>
-        <p:grpSpPr>
-          <a:xfrm flipH="1">
-            <a:off x="7458064" y="2976049"/>
-            <a:ext cx="3873674" cy="841685"/>
-            <a:chOff x="850726" y="3118672"/>
-            <a:chExt cx="3873674" cy="841685"/>
-          </a:xfrm>
-          <a:solidFill>
-            <a:srgbClr val="8664B0"/>
-          </a:solidFill>
-        </p:grpSpPr>
-        <p:sp>
-          <p:nvSpPr>
-            <p:cNvPr id="10" name="Right Triangle 9">
-              <a:extLst>
-                <a:ext uri="{FF2B5EF4-FFF2-40B4-BE49-F238E27FC236}">
-                  <a16:creationId xmlns:a16="http://schemas.microsoft.com/office/drawing/2014/main" id="{81655491-8E15-337D-8FE4-D83BD739EBEA}"/>
-                </a:ext>
-              </a:extLst>
-            </p:cNvPr>
-            <p:cNvSpPr>
-              <a:spLocks noChangeAspect="1"/>
-            </p:cNvSpPr>
-            <p:nvPr/>
-          </p:nvSpPr>
-          <p:spPr>
-            <a:xfrm flipH="1" flipV="1">
-              <a:off x="850726" y="3118672"/>
-              <a:ext cx="419100" cy="310327"/>
-            </a:xfrm>
-            <a:prstGeom prst="rtTriangle">
-              <a:avLst/>
-            </a:prstGeom>
-            <a:grpFill/>
-            <a:ln>
-              <a:noFill/>
-            </a:ln>
-          </p:spPr>
-          <p:style>
-            <a:lnRef idx="2">
-              <a:schemeClr val="accent1">
-                <a:shade val="15000"/>
-              </a:schemeClr>
-            </a:lnRef>
-            <a:fillRef idx="1">
-              <a:schemeClr val="accent1"/>
-            </a:fillRef>
-            <a:effectRef idx="0">
-              <a:schemeClr val="accent1"/>
-            </a:effectRef>
-            <a:fontRef idx="minor">
-              <a:schemeClr val="lt1"/>
-            </a:fontRef>
-          </p:style>
-          <p:txBody>
-            <a:bodyPr rtlCol="0" anchor="ctr"/>
-            <a:lstStyle/>
-            <a:p>
-              <a:pPr algn="ctr"/>
-              <a:endParaRPr lang="en-US"/>
-            </a:p>
-          </p:txBody>
-        </p:sp>
-        <p:sp>
-          <p:nvSpPr>
-            <p:cNvPr id="11" name="Rectangle: Rounded Corners 10">
-              <a:extLst>
-                <a:ext uri="{FF2B5EF4-FFF2-40B4-BE49-F238E27FC236}">
-                  <a16:creationId xmlns:a16="http://schemas.microsoft.com/office/drawing/2014/main" id="{E8764DEF-3359-95DB-EFFE-CAE873FC9EA3}"/>
-                </a:ext>
-              </a:extLst>
-            </p:cNvPr>
-            <p:cNvSpPr>
-              <a:spLocks/>
-            </p:cNvSpPr>
-            <p:nvPr/>
-          </p:nvSpPr>
-          <p:spPr>
-            <a:xfrm>
-              <a:off x="1126684" y="3118935"/>
-              <a:ext cx="3597716" cy="841422"/>
-            </a:xfrm>
-            <a:prstGeom prst="roundRect">
-              <a:avLst/>
-            </a:prstGeom>
-            <a:grpFill/>
-            <a:ln>
-              <a:noFill/>
-            </a:ln>
-          </p:spPr>
-          <p:style>
-            <a:lnRef idx="2">
-              <a:schemeClr val="accent1">
-                <a:shade val="15000"/>
-              </a:schemeClr>
-            </a:lnRef>
-            <a:fillRef idx="1">
-              <a:schemeClr val="accent1"/>
-            </a:fillRef>
-            <a:effectRef idx="0">
-              <a:schemeClr val="accent1"/>
-            </a:effectRef>
-            <a:fontRef idx="minor">
-              <a:schemeClr val="lt1"/>
-            </a:fontRef>
-          </p:style>
-          <p:txBody>
-            <a:bodyPr rtlCol="0" anchor="ctr"/>
-            <a:lstStyle/>
-            <a:p>
-              <a:r>
-                <a:rPr lang="en-US" sz="2000">
-                  <a:latin typeface="Roboto" panose="02000000000000000000" pitchFamily="2" charset="0"/>
-                  <a:ea typeface="Roboto" panose="02000000000000000000" pitchFamily="2" charset="0"/>
-                </a:rPr>
-                <a:t> hast du die woche lust was </a:t>
-              </a:r>
-            </a:p>
-            <a:p>
-              <a:r>
-                <a:rPr lang="en-US" sz="2000">
-                  <a:latin typeface="Roboto" panose="02000000000000000000" pitchFamily="2" charset="0"/>
-                  <a:ea typeface="Roboto" panose="02000000000000000000" pitchFamily="2" charset="0"/>
-                </a:rPr>
-                <a:t> zu machen? </a:t>
-              </a:r>
-              <a:r>
-                <a:rPr lang="en-US" sz="2000">
-                  <a:latin typeface="Roboto" panose="02000000000000000000" pitchFamily="2" charset="0"/>
-                  <a:ea typeface="Roboto" panose="02000000000000000000" pitchFamily="2" charset="0"/>
-                  <a:sym typeface="Wingdings" panose="05000000000000000000" pitchFamily="2" charset="2"/>
-                </a:rPr>
-                <a:t> </a:t>
-              </a:r>
-              <a:endParaRPr lang="en-US" sz="2000">
-                <a:latin typeface="Roboto" panose="02000000000000000000" pitchFamily="2" charset="0"/>
-                <a:ea typeface="Roboto" panose="02000000000000000000" pitchFamily="2" charset="0"/>
-              </a:endParaRPr>
-            </a:p>
-          </p:txBody>
-        </p:sp>
-      </p:grpSp>
-      <p:grpSp>
-        <p:nvGrpSpPr>
-          <p:cNvPr id="45" name="Group 44">
-            <a:extLst>
-              <a:ext uri="{FF2B5EF4-FFF2-40B4-BE49-F238E27FC236}">
-                <a16:creationId xmlns:a16="http://schemas.microsoft.com/office/drawing/2014/main" id="{A52048F6-48D5-F359-7219-29E3529D353D}"/>
-              </a:ext>
-            </a:extLst>
-          </p:cNvPr>
-          <p:cNvGrpSpPr/>
-          <p:nvPr/>
-        </p:nvGrpSpPr>
-        <p:grpSpPr>
-          <a:xfrm flipH="1">
-            <a:off x="8372464" y="4075771"/>
-            <a:ext cx="2959274" cy="642932"/>
-            <a:chOff x="574501" y="3844401"/>
-            <a:chExt cx="2959274" cy="642932"/>
-          </a:xfrm>
-          <a:solidFill>
-            <a:srgbClr val="8664B0"/>
-          </a:solidFill>
-        </p:grpSpPr>
-        <p:sp>
-          <p:nvSpPr>
-            <p:cNvPr id="43" name="Right Triangle 42">
-              <a:extLst>
-                <a:ext uri="{FF2B5EF4-FFF2-40B4-BE49-F238E27FC236}">
-                  <a16:creationId xmlns:a16="http://schemas.microsoft.com/office/drawing/2014/main" id="{B5378F05-946A-9861-F398-076826B8ADC3}"/>
-                </a:ext>
-              </a:extLst>
-            </p:cNvPr>
-            <p:cNvSpPr>
-              <a:spLocks noChangeAspect="1"/>
-            </p:cNvSpPr>
-            <p:nvPr/>
-          </p:nvSpPr>
-          <p:spPr>
-            <a:xfrm flipH="1" flipV="1">
-              <a:off x="574501" y="3844401"/>
-              <a:ext cx="419100" cy="310327"/>
-            </a:xfrm>
-            <a:prstGeom prst="rtTriangle">
-              <a:avLst/>
-            </a:prstGeom>
-            <a:grpFill/>
-            <a:ln>
-              <a:noFill/>
-            </a:ln>
-          </p:spPr>
-          <p:style>
-            <a:lnRef idx="2">
-              <a:schemeClr val="accent1">
-                <a:shade val="15000"/>
-              </a:schemeClr>
-            </a:lnRef>
-            <a:fillRef idx="1">
-              <a:schemeClr val="accent1"/>
-            </a:fillRef>
-            <a:effectRef idx="0">
-              <a:schemeClr val="accent1"/>
-            </a:effectRef>
-            <a:fontRef idx="minor">
-              <a:schemeClr val="lt1"/>
-            </a:fontRef>
-          </p:style>
-          <p:txBody>
-            <a:bodyPr rtlCol="0" anchor="ctr"/>
-            <a:lstStyle/>
-            <a:p>
-              <a:pPr algn="ctr"/>
-              <a:endParaRPr lang="en-US"/>
-            </a:p>
-          </p:txBody>
-        </p:sp>
-        <p:sp>
-          <p:nvSpPr>
-            <p:cNvPr id="44" name="Rectangle: Rounded Corners 43">
-              <a:extLst>
-                <a:ext uri="{FF2B5EF4-FFF2-40B4-BE49-F238E27FC236}">
-                  <a16:creationId xmlns:a16="http://schemas.microsoft.com/office/drawing/2014/main" id="{DBC1D011-01D6-323F-384A-EE29EAE4262F}"/>
-                </a:ext>
-              </a:extLst>
-            </p:cNvPr>
-            <p:cNvSpPr>
-              <a:spLocks/>
-            </p:cNvSpPr>
-            <p:nvPr/>
-          </p:nvSpPr>
-          <p:spPr>
-            <a:xfrm>
-              <a:off x="850459" y="3844401"/>
-              <a:ext cx="2683316" cy="642932"/>
-            </a:xfrm>
-            <a:prstGeom prst="roundRect">
-              <a:avLst/>
-            </a:prstGeom>
-            <a:grpFill/>
-            <a:ln>
-              <a:noFill/>
-            </a:ln>
-          </p:spPr>
-          <p:style>
-            <a:lnRef idx="2">
-              <a:schemeClr val="accent1">
-                <a:shade val="15000"/>
-              </a:schemeClr>
-            </a:lnRef>
-            <a:fillRef idx="1">
-              <a:schemeClr val="accent1"/>
-            </a:fillRef>
-            <a:effectRef idx="0">
-              <a:schemeClr val="accent1"/>
-            </a:effectRef>
-            <a:fontRef idx="minor">
-              <a:schemeClr val="lt1"/>
-            </a:fontRef>
-          </p:style>
-          <p:txBody>
-            <a:bodyPr rtlCol="0" anchor="ctr"/>
-            <a:lstStyle/>
-            <a:p>
-              <a:r>
-                <a:rPr lang="en-US" sz="2000">
-                  <a:latin typeface="Roboto" panose="02000000000000000000" pitchFamily="2" charset="0"/>
-                  <a:ea typeface="Roboto" panose="02000000000000000000" pitchFamily="2" charset="0"/>
-                </a:rPr>
-                <a:t> vielleicht dienstag?</a:t>
-              </a:r>
-            </a:p>
-          </p:txBody>
-        </p:sp>
-      </p:grpSp>
-      <p:grpSp>
-        <p:nvGrpSpPr>
-          <p:cNvPr id="3" name="Group 2">
-            <a:extLst>
-              <a:ext uri="{FF2B5EF4-FFF2-40B4-BE49-F238E27FC236}">
-                <a16:creationId xmlns:a16="http://schemas.microsoft.com/office/drawing/2014/main" id="{849E305D-4A64-0F9D-DD82-E2AB5D4DCCAA}"/>
-              </a:ext>
-            </a:extLst>
-          </p:cNvPr>
-          <p:cNvGrpSpPr/>
-          <p:nvPr/>
-        </p:nvGrpSpPr>
-        <p:grpSpPr>
-          <a:xfrm>
-            <a:off x="752302" y="434901"/>
-            <a:ext cx="6520565" cy="1348764"/>
-            <a:chOff x="5806990" y="2922833"/>
-            <a:chExt cx="6520565" cy="1348764"/>
-          </a:xfrm>
-          <a:solidFill>
-            <a:srgbClr val="46B1E6"/>
-          </a:solidFill>
-        </p:grpSpPr>
-        <p:sp>
-          <p:nvSpPr>
-            <p:cNvPr id="6" name="Right Triangle 5">
-              <a:extLst>
-                <a:ext uri="{FF2B5EF4-FFF2-40B4-BE49-F238E27FC236}">
-                  <a16:creationId xmlns:a16="http://schemas.microsoft.com/office/drawing/2014/main" id="{83F01BC9-C2B8-85C9-3D5C-2B4BE6577676}"/>
-                </a:ext>
-              </a:extLst>
-            </p:cNvPr>
-            <p:cNvSpPr>
-              <a:spLocks noChangeAspect="1"/>
-            </p:cNvSpPr>
-            <p:nvPr/>
-          </p:nvSpPr>
-          <p:spPr>
-            <a:xfrm flipH="1" flipV="1">
-              <a:off x="5806990" y="2922833"/>
-              <a:ext cx="492210" cy="310327"/>
-            </a:xfrm>
-            <a:prstGeom prst="rtTriangle">
-              <a:avLst/>
-            </a:prstGeom>
-            <a:grpFill/>
-            <a:ln>
-              <a:noFill/>
-            </a:ln>
-          </p:spPr>
-          <p:style>
-            <a:lnRef idx="2">
-              <a:schemeClr val="accent1">
-                <a:shade val="15000"/>
-              </a:schemeClr>
-            </a:lnRef>
-            <a:fillRef idx="1">
-              <a:schemeClr val="accent1"/>
-            </a:fillRef>
-            <a:effectRef idx="0">
-              <a:schemeClr val="accent1"/>
-            </a:effectRef>
-            <a:fontRef idx="minor">
-              <a:schemeClr val="lt1"/>
-            </a:fontRef>
-          </p:style>
-          <p:txBody>
-            <a:bodyPr rtlCol="0" anchor="ctr"/>
-            <a:lstStyle/>
-            <a:p>
-              <a:pPr algn="ctr"/>
-              <a:endParaRPr lang="en-US"/>
-            </a:p>
-          </p:txBody>
-        </p:sp>
-        <p:sp>
-          <p:nvSpPr>
-            <p:cNvPr id="9" name="Rectangle: Rounded Corners 8">
-              <a:extLst>
-                <a:ext uri="{FF2B5EF4-FFF2-40B4-BE49-F238E27FC236}">
-                  <a16:creationId xmlns:a16="http://schemas.microsoft.com/office/drawing/2014/main" id="{D2443607-160A-25B9-2734-24193DBF17D8}"/>
-                </a:ext>
-              </a:extLst>
-            </p:cNvPr>
-            <p:cNvSpPr>
-              <a:spLocks/>
-            </p:cNvSpPr>
-            <p:nvPr/>
-          </p:nvSpPr>
-          <p:spPr>
-            <a:xfrm>
-              <a:off x="6082947" y="2923420"/>
-              <a:ext cx="6244608" cy="1348177"/>
-            </a:xfrm>
-            <a:prstGeom prst="roundRect">
-              <a:avLst/>
-            </a:prstGeom>
-            <a:grpFill/>
-            <a:ln>
-              <a:noFill/>
-            </a:ln>
-          </p:spPr>
-          <p:style>
-            <a:lnRef idx="2">
-              <a:schemeClr val="accent1">
-                <a:shade val="15000"/>
-              </a:schemeClr>
-            </a:lnRef>
-            <a:fillRef idx="1">
-              <a:schemeClr val="accent1"/>
-            </a:fillRef>
-            <a:effectRef idx="0">
-              <a:schemeClr val="accent1"/>
-            </a:effectRef>
-            <a:fontRef idx="minor">
-              <a:schemeClr val="lt1"/>
-            </a:fontRef>
-          </p:style>
-          <p:txBody>
-            <a:bodyPr rtlCol="0" anchor="ctr"/>
-            <a:lstStyle/>
-            <a:p>
-              <a:r>
-                <a:rPr lang="en-US" sz="3600" b="1">
-                  <a:latin typeface="Roboto" panose="02000000000000000000" pitchFamily="2" charset="0"/>
-                  <a:ea typeface="Roboto" panose="02000000000000000000" pitchFamily="2" charset="0"/>
-                </a:rPr>
-                <a:t>  Kommunikationsstil und</a:t>
-              </a:r>
-            </a:p>
-            <a:p>
-              <a:r>
-                <a:rPr lang="en-US" sz="3600" b="1">
-                  <a:latin typeface="Roboto" panose="02000000000000000000" pitchFamily="2" charset="0"/>
-                  <a:ea typeface="Roboto" panose="02000000000000000000" pitchFamily="2" charset="0"/>
-                </a:rPr>
-                <a:t>  “Ton”</a:t>
-              </a:r>
-            </a:p>
-          </p:txBody>
-        </p:sp>
-      </p:grpSp>
-      <p:sp>
-        <p:nvSpPr>
-          <p:cNvPr id="20" name="TextBox 19">
-            <a:extLst>
-              <a:ext uri="{FF2B5EF4-FFF2-40B4-BE49-F238E27FC236}">
-                <a16:creationId xmlns:a16="http://schemas.microsoft.com/office/drawing/2014/main" id="{A9A2F2A3-F432-B2DD-BAF0-202CDB13B8AA}"/>
-              </a:ext>
-            </a:extLst>
-          </p:cNvPr>
-          <p:cNvSpPr txBox="1"/>
-          <p:nvPr/>
-        </p:nvSpPr>
-        <p:spPr>
-          <a:xfrm>
-            <a:off x="4540228" y="6588289"/>
-            <a:ext cx="7651772" cy="276999"/>
-          </a:xfrm>
-          <a:prstGeom prst="rect">
-            <a:avLst/>
-          </a:prstGeom>
-          <a:noFill/>
-        </p:spPr>
-        <p:txBody>
-          <a:bodyPr wrap="square" rtlCol="0">
-            <a:spAutoFit/>
-          </a:bodyPr>
-          <a:lstStyle/>
-          <a:p>
-            <a:pPr algn="r"/>
-            <a:r>
-              <a:rPr lang="de-DE" sz="1200"/>
-              <a:t>cf.: McCulloch (2019, Ch. 4)</a:t>
-            </a:r>
-            <a:endParaRPr lang="en-US" sz="1200"/>
-          </a:p>
-        </p:txBody>
-      </p:sp>
-      <p:grpSp>
-        <p:nvGrpSpPr>
-          <p:cNvPr id="15" name="Group 14">
-            <a:extLst>
-              <a:ext uri="{FF2B5EF4-FFF2-40B4-BE49-F238E27FC236}">
-                <a16:creationId xmlns:a16="http://schemas.microsoft.com/office/drawing/2014/main" id="{43DEC4C9-4116-9746-F402-5BBC19E229FD}"/>
-              </a:ext>
-            </a:extLst>
-          </p:cNvPr>
-          <p:cNvGrpSpPr/>
-          <p:nvPr/>
-        </p:nvGrpSpPr>
-        <p:grpSpPr>
-          <a:xfrm>
-            <a:off x="752302" y="5162889"/>
-            <a:ext cx="4543598" cy="1092955"/>
-            <a:chOff x="5806990" y="2923158"/>
-            <a:chExt cx="4543598" cy="1092955"/>
-          </a:xfrm>
-          <a:solidFill>
-            <a:srgbClr val="46B1E6"/>
-          </a:solidFill>
-        </p:grpSpPr>
-        <p:sp>
-          <p:nvSpPr>
-            <p:cNvPr id="16" name="Right Triangle 15">
-              <a:extLst>
-                <a:ext uri="{FF2B5EF4-FFF2-40B4-BE49-F238E27FC236}">
-                  <a16:creationId xmlns:a16="http://schemas.microsoft.com/office/drawing/2014/main" id="{0AA9C671-B3E5-F773-952C-B0A5DCA96461}"/>
-                </a:ext>
-              </a:extLst>
-            </p:cNvPr>
-            <p:cNvSpPr>
-              <a:spLocks noChangeAspect="1"/>
-            </p:cNvSpPr>
-            <p:nvPr/>
-          </p:nvSpPr>
-          <p:spPr>
-            <a:xfrm flipH="1" flipV="1">
-              <a:off x="5806990" y="2923158"/>
-              <a:ext cx="492210" cy="310327"/>
-            </a:xfrm>
-            <a:prstGeom prst="rtTriangle">
-              <a:avLst/>
-            </a:prstGeom>
-            <a:grpFill/>
-            <a:ln>
-              <a:noFill/>
-            </a:ln>
-          </p:spPr>
-          <p:style>
-            <a:lnRef idx="2">
-              <a:schemeClr val="accent1">
-                <a:shade val="15000"/>
-              </a:schemeClr>
-            </a:lnRef>
-            <a:fillRef idx="1">
-              <a:schemeClr val="accent1"/>
-            </a:fillRef>
-            <a:effectRef idx="0">
-              <a:schemeClr val="accent1"/>
-            </a:effectRef>
-            <a:fontRef idx="minor">
-              <a:schemeClr val="lt1"/>
-            </a:fontRef>
-          </p:style>
-          <p:txBody>
-            <a:bodyPr rtlCol="0" anchor="ctr"/>
-            <a:lstStyle/>
-            <a:p>
-              <a:pPr algn="ctr"/>
-              <a:endParaRPr lang="en-US"/>
-            </a:p>
-          </p:txBody>
-        </p:sp>
-        <p:sp>
-          <p:nvSpPr>
-            <p:cNvPr id="17" name="Rectangle: Rounded Corners 16">
-              <a:extLst>
-                <a:ext uri="{FF2B5EF4-FFF2-40B4-BE49-F238E27FC236}">
-                  <a16:creationId xmlns:a16="http://schemas.microsoft.com/office/drawing/2014/main" id="{A4AB37FD-E4E5-26F5-27F9-4210CD5684EB}"/>
-                </a:ext>
-              </a:extLst>
-            </p:cNvPr>
-            <p:cNvSpPr>
-              <a:spLocks/>
-            </p:cNvSpPr>
-            <p:nvPr/>
-          </p:nvSpPr>
-          <p:spPr>
-            <a:xfrm>
-              <a:off x="6082947" y="2923421"/>
-              <a:ext cx="4267641" cy="1092692"/>
-            </a:xfrm>
-            <a:prstGeom prst="roundRect">
-              <a:avLst/>
-            </a:prstGeom>
-            <a:grpFill/>
-            <a:ln>
-              <a:noFill/>
-            </a:ln>
-          </p:spPr>
-          <p:style>
-            <a:lnRef idx="2">
-              <a:schemeClr val="accent1">
-                <a:shade val="15000"/>
-              </a:schemeClr>
-            </a:lnRef>
-            <a:fillRef idx="1">
-              <a:schemeClr val="accent1"/>
-            </a:fillRef>
-            <a:effectRef idx="0">
-              <a:schemeClr val="accent1"/>
-            </a:effectRef>
-            <a:fontRef idx="minor">
-              <a:schemeClr val="lt1"/>
-            </a:fontRef>
-          </p:style>
-          <p:txBody>
-            <a:bodyPr rtlCol="0" anchor="ctr"/>
-            <a:lstStyle/>
-            <a:p>
-              <a:r>
-                <a:rPr lang="en-US" sz="2000">
-                  <a:latin typeface="Roboto" panose="02000000000000000000" pitchFamily="2" charset="0"/>
-                  <a:ea typeface="Roboto" panose="02000000000000000000" pitchFamily="2" charset="0"/>
-                </a:rPr>
-                <a:t> wenn du das möchtest, können </a:t>
-              </a:r>
-            </a:p>
-            <a:p>
-              <a:r>
-                <a:rPr lang="en-US" sz="2000">
-                  <a:latin typeface="Roboto" panose="02000000000000000000" pitchFamily="2" charset="0"/>
-                  <a:ea typeface="Roboto" panose="02000000000000000000" pitchFamily="2" charset="0"/>
-                </a:rPr>
-                <a:t> wir das tun... aber dienstag habe </a:t>
-              </a:r>
-            </a:p>
-            <a:p>
-              <a:r>
-                <a:rPr lang="en-US" sz="2000">
-                  <a:latin typeface="Roboto" panose="02000000000000000000" pitchFamily="2" charset="0"/>
-                  <a:ea typeface="Roboto" panose="02000000000000000000" pitchFamily="2" charset="0"/>
-                </a:rPr>
-                <a:t> ich keine zeit</a:t>
-              </a:r>
-            </a:p>
-          </p:txBody>
-        </p:sp>
-      </p:grpSp>
-    </p:spTree>
-    <p:extLst>
-      <p:ext uri="{BB962C8B-B14F-4D97-AF65-F5344CB8AC3E}">
-        <p14:creationId xmlns:p14="http://schemas.microsoft.com/office/powerpoint/2010/main" val="2902665876"/>
-      </p:ext>
-    </p:extLst>
-  </p:cSld>
-  <p:clrMapOvr>
-    <a:masterClrMapping/>
-  </p:clrMapOvr>
-  <p:transition spd="slow">
-    <p:push dir="u"/>
-  </p:transition>
-  <p:timing>
-    <p:tnLst>
-      <p:par>
-        <p:cTn id="1" dur="indefinite" restart="never" nodeType="tmRoot">
-          <p:childTnLst>
-            <p:seq concurrent="1" nextAc="seek">
-              <p:cTn id="2" dur="indefinite" nodeType="mainSeq">
-                <p:childTnLst>
-                  <p:par>
-                    <p:cTn id="3" fill="hold">
-                      <p:stCondLst>
-                        <p:cond delay="indefinite"/>
-                      </p:stCondLst>
-                      <p:childTnLst>
-                        <p:par>
-                          <p:cTn id="4" fill="hold">
-                            <p:stCondLst>
-                              <p:cond delay="0"/>
-                            </p:stCondLst>
-                            <p:childTnLst>
-                              <p:par>
-                                <p:cTn id="5" presetID="10" presetClass="entr" presetSubtype="0" fill="hold" nodeType="clickEffect">
-                                  <p:stCondLst>
-                                    <p:cond delay="0"/>
-                                  </p:stCondLst>
-                                  <p:childTnLst>
-                                    <p:set>
-                                      <p:cBhvr>
-                                        <p:cTn id="6" dur="1" fill="hold">
-                                          <p:stCondLst>
-                                            <p:cond delay="0"/>
-                                          </p:stCondLst>
-                                        </p:cTn>
-                                        <p:tgtEl>
-                                          <p:spTgt spid="12"/>
-                                        </p:tgtEl>
-                                        <p:attrNameLst>
-                                          <p:attrName>style.visibility</p:attrName>
-                                        </p:attrNameLst>
-                                      </p:cBhvr>
-                                      <p:to>
-                                        <p:strVal val="visible"/>
-                                      </p:to>
-                                    </p:set>
-                                    <p:animEffect transition="in" filter="fade">
-                                      <p:cBhvr>
-                                        <p:cTn id="7" dur="500"/>
-                                        <p:tgtEl>
-                                          <p:spTgt spid="12"/>
-                                        </p:tgtEl>
-                                      </p:cBhvr>
-                                    </p:animEffect>
-                                  </p:childTnLst>
-                                </p:cTn>
-                              </p:par>
-                              <p:par>
-                                <p:cTn id="8" presetID="10" presetClass="entr" presetSubtype="0" fill="hold" nodeType="withEffect">
-                                  <p:stCondLst>
-                                    <p:cond delay="0"/>
-                                  </p:stCondLst>
-                                  <p:childTnLst>
-                                    <p:set>
-                                      <p:cBhvr>
-                                        <p:cTn id="9" dur="1" fill="hold">
-                                          <p:stCondLst>
-                                            <p:cond delay="0"/>
-                                          </p:stCondLst>
-                                        </p:cTn>
-                                        <p:tgtEl>
-                                          <p:spTgt spid="14"/>
-                                        </p:tgtEl>
-                                        <p:attrNameLst>
-                                          <p:attrName>style.visibility</p:attrName>
-                                        </p:attrNameLst>
-                                      </p:cBhvr>
-                                      <p:to>
-                                        <p:strVal val="visible"/>
-                                      </p:to>
-                                    </p:set>
-                                    <p:animEffect transition="in" filter="fade">
-                                      <p:cBhvr>
-                                        <p:cTn id="10" dur="500"/>
-                                        <p:tgtEl>
-                                          <p:spTgt spid="14"/>
-                                        </p:tgtEl>
-                                      </p:cBhvr>
-                                    </p:animEffect>
-                                  </p:childTnLst>
-                                </p:cTn>
-                              </p:par>
-                              <p:par>
-                                <p:cTn id="11" presetID="10" presetClass="entr" presetSubtype="0" fill="hold" nodeType="withEffect">
-                                  <p:stCondLst>
-                                    <p:cond delay="0"/>
-                                  </p:stCondLst>
-                                  <p:childTnLst>
-                                    <p:set>
-                                      <p:cBhvr>
-                                        <p:cTn id="12" dur="1" fill="hold">
-                                          <p:stCondLst>
-                                            <p:cond delay="0"/>
-                                          </p:stCondLst>
-                                        </p:cTn>
-                                        <p:tgtEl>
-                                          <p:spTgt spid="45"/>
-                                        </p:tgtEl>
-                                        <p:attrNameLst>
-                                          <p:attrName>style.visibility</p:attrName>
-                                        </p:attrNameLst>
-                                      </p:cBhvr>
-                                      <p:to>
-                                        <p:strVal val="visible"/>
-                                      </p:to>
-                                    </p:set>
-                                    <p:animEffect transition="in" filter="fade">
-                                      <p:cBhvr>
-                                        <p:cTn id="13" dur="500"/>
-                                        <p:tgtEl>
-                                          <p:spTgt spid="45"/>
-                                        </p:tgtEl>
-                                      </p:cBhvr>
-                                    </p:animEffect>
-                                  </p:childTnLst>
-                                </p:cTn>
-                              </p:par>
-                            </p:childTnLst>
-                          </p:cTn>
-                        </p:par>
-                      </p:childTnLst>
-                    </p:cTn>
-                  </p:par>
-                  <p:par>
-                    <p:cTn id="14" fill="hold">
-                      <p:stCondLst>
-                        <p:cond delay="indefinite"/>
-                      </p:stCondLst>
-                      <p:childTnLst>
-                        <p:par>
-                          <p:cTn id="15" fill="hold">
-                            <p:stCondLst>
-                              <p:cond delay="0"/>
-                            </p:stCondLst>
-                            <p:childTnLst>
-                              <p:par>
-                                <p:cTn id="16" presetID="10" presetClass="entr" presetSubtype="0" fill="hold" nodeType="clickEffect">
-                                  <p:stCondLst>
-                                    <p:cond delay="0"/>
-                                  </p:stCondLst>
-                                  <p:childTnLst>
-                                    <p:set>
-                                      <p:cBhvr>
-                                        <p:cTn id="17" dur="1" fill="hold">
-                                          <p:stCondLst>
-                                            <p:cond delay="0"/>
-                                          </p:stCondLst>
-                                        </p:cTn>
-                                        <p:tgtEl>
-                                          <p:spTgt spid="15"/>
-                                        </p:tgtEl>
-                                        <p:attrNameLst>
-                                          <p:attrName>style.visibility</p:attrName>
-                                        </p:attrNameLst>
-                                      </p:cBhvr>
-                                      <p:to>
-                                        <p:strVal val="visible"/>
-                                      </p:to>
-                                    </p:set>
-                                    <p:animEffect transition="in" filter="fade">
-                                      <p:cBhvr>
-                                        <p:cTn id="18" dur="500"/>
-                                        <p:tgtEl>
-                                          <p:spTgt spid="15"/>
-                                        </p:tgtEl>
-                                      </p:cBhvr>
-                                    </p:animEffect>
-                                  </p:childTnLst>
-                                </p:cTn>
-                              </p:par>
-                            </p:childTnLst>
-                          </p:cTn>
-                        </p:par>
-                      </p:childTnLst>
-                    </p:cTn>
-                  </p:par>
-                </p:childTnLst>
-              </p:cTn>
-              <p:prevCondLst>
-                <p:cond evt="onPrev" delay="0">
-                  <p:tgtEl>
-                    <p:sldTgt/>
-                  </p:tgtEl>
-                </p:cond>
-              </p:prevCondLst>
-              <p:nextCondLst>
-                <p:cond evt="onNext" delay="0">
-                  <p:tgtEl>
-                    <p:sldTgt/>
-                  </p:tgtEl>
-                </p:cond>
-              </p:nextCondLst>
-            </p:seq>
-          </p:childTnLst>
-        </p:cTn>
-      </p:par>
-    </p:tnLst>
-  </p:timing>
-</p:sld>
-</file>
-
-<file path=ppt/slides/slide3.xml><?xml version="1.0" encoding="utf-8"?>
-<p:sld xmlns:a="http://schemas.openxmlformats.org/drawingml/2006/main" xmlns:r="http://schemas.openxmlformats.org/officeDocument/2006/relationships" xmlns:p="http://schemas.openxmlformats.org/presentationml/2006/main">
-  <p:cSld>
-    <p:spTree>
-      <p:nvGrpSpPr>
-        <p:cNvPr id="1" name="">
-          <a:extLst>
-            <a:ext uri="{FF2B5EF4-FFF2-40B4-BE49-F238E27FC236}">
               <a16:creationId xmlns:a16="http://schemas.microsoft.com/office/drawing/2014/main" id="{8A8D7F31-DDA5-7630-3158-F118DC444541}"/>
             </a:ext>
           </a:extLst>
@@ -10447,7 +9273,25 @@
                 </a:solidFill>
                 <a:latin typeface="Amasis MT Pro Black" panose="02040A04050005020304" pitchFamily="18" charset="0"/>
               </a:rPr>
-              <a:t> and expected their addressees to understand their intentions more than was warranted.”</a:t>
+              <a:t> and expected their addressees to understand their </a:t>
+            </a:r>
+            <a:r>
+              <a:rPr lang="en-US">
+                <a:solidFill>
+                  <a:srgbClr val="D25ABB"/>
+                </a:solidFill>
+                <a:latin typeface="Amasis MT Pro Black" panose="02040A04050005020304" pitchFamily="18" charset="0"/>
+              </a:rPr>
+              <a:t>intentions</a:t>
+            </a:r>
+            <a:r>
+              <a:rPr lang="en-US">
+                <a:solidFill>
+                  <a:schemeClr val="bg1"/>
+                </a:solidFill>
+                <a:latin typeface="Amasis MT Pro Black" panose="02040A04050005020304" pitchFamily="18" charset="0"/>
+              </a:rPr>
+              <a:t> more than was warranted.”</a:t>
             </a:r>
           </a:p>
           <a:p>
@@ -10700,7 +9544,7 @@
 </p:sld>
 </file>
 
-<file path=ppt/slides/slide4.xml><?xml version="1.0" encoding="utf-8"?>
+<file path=ppt/slides/slide3.xml><?xml version="1.0" encoding="utf-8"?>
 <p:sld xmlns:a="http://schemas.openxmlformats.org/drawingml/2006/main" xmlns:r="http://schemas.openxmlformats.org/officeDocument/2006/relationships" xmlns:p="http://schemas.openxmlformats.org/presentationml/2006/main">
   <p:cSld>
     <p:spTree>
@@ -12423,7 +11267,7 @@
 </p:sld>
 </file>
 
-<file path=ppt/slides/slide5.xml><?xml version="1.0" encoding="utf-8"?>
+<file path=ppt/slides/slide4.xml><?xml version="1.0" encoding="utf-8"?>
 <p:sld xmlns:a="http://schemas.openxmlformats.org/drawingml/2006/main" xmlns:r="http://schemas.openxmlformats.org/officeDocument/2006/relationships" xmlns:p="http://schemas.openxmlformats.org/presentationml/2006/main">
   <p:cSld>
     <p:spTree>
@@ -12532,7 +11376,7 @@
 </p:sld>
 </file>
 
-<file path=ppt/slides/slide6.xml><?xml version="1.0" encoding="utf-8"?>
+<file path=ppt/slides/slide5.xml><?xml version="1.0" encoding="utf-8"?>
 <p:sld xmlns:a="http://schemas.openxmlformats.org/drawingml/2006/main" xmlns:r="http://schemas.openxmlformats.org/officeDocument/2006/relationships" xmlns:p="http://schemas.openxmlformats.org/presentationml/2006/main" showMasterSp="0">
   <p:cSld>
     <p:bg>

--- a/KVM/Präsentation/KVM_MissverständnisseTexten.pptx
+++ b/KVM/Präsentation/KVM_MissverständnisseTexten.pptx
@@ -1148,7 +1148,7 @@
           <a:effectLst/>
           <a:extLst>
             <a:ext uri="{91240B29-F687-4f45-9708-019B960494DF}">
-              <a14:hiddenLine xmlns="" xmlns:a14="http://schemas.microsoft.com/office/drawing/2010/main" w="9525">
+              <a14:hiddenLine xmlns:a14="http://schemas.microsoft.com/office/drawing/2010/main" xmlns="" w="9525">
                 <a:solidFill>
                   <a:srgbClr val="000000"/>
                 </a:solidFill>
@@ -2692,7 +2692,7 @@
           <a:ln/>
           <a:extLst>
             <a:ext uri="{91240B29-F687-4f45-9708-019B960494DF}">
-              <a14:hiddenLine xmlns="" xmlns:a14="http://schemas.microsoft.com/office/drawing/2010/main" w="9525">
+              <a14:hiddenLine xmlns:a14="http://schemas.microsoft.com/office/drawing/2010/main" xmlns="" w="9525">
                 <a:solidFill>
                   <a:srgbClr val="000000"/>
                 </a:solidFill>
@@ -2974,7 +2974,7 @@
           <a:ln/>
           <a:extLst>
             <a:ext uri="{91240B29-F687-4f45-9708-019B960494DF}">
-              <a14:hiddenLine xmlns="" xmlns:a14="http://schemas.microsoft.com/office/drawing/2010/main" w="9525">
+              <a14:hiddenLine xmlns:a14="http://schemas.microsoft.com/office/drawing/2010/main" xmlns="" w="9525">
                 <a:solidFill>
                   <a:srgbClr val="000000"/>
                 </a:solidFill>
@@ -3264,7 +3264,7 @@
           <a:ln/>
           <a:extLst>
             <a:ext uri="{91240B29-F687-4f45-9708-019B960494DF}">
-              <a14:hiddenLine xmlns="" xmlns:a14="http://schemas.microsoft.com/office/drawing/2010/main" w="9525">
+              <a14:hiddenLine xmlns:a14="http://schemas.microsoft.com/office/drawing/2010/main" xmlns="" w="9525">
                 <a:solidFill>
                   <a:srgbClr val="000000"/>
                 </a:solidFill>
@@ -3904,7 +3904,7 @@
           <a:ln/>
           <a:extLst>
             <a:ext uri="{91240B29-F687-4f45-9708-019B960494DF}">
-              <a14:hiddenLine xmlns="" xmlns:a14="http://schemas.microsoft.com/office/drawing/2010/main" w="9525">
+              <a14:hiddenLine xmlns:a14="http://schemas.microsoft.com/office/drawing/2010/main" xmlns="" w="9525">
                 <a:solidFill>
                   <a:srgbClr val="000000"/>
                 </a:solidFill>
@@ -4250,7 +4250,7 @@
           <a:ln/>
           <a:extLst>
             <a:ext uri="{91240B29-F687-4f45-9708-019B960494DF}">
-              <a14:hiddenLine xmlns="" xmlns:a14="http://schemas.microsoft.com/office/drawing/2010/main" w="9525">
+              <a14:hiddenLine xmlns:a14="http://schemas.microsoft.com/office/drawing/2010/main" xmlns="" w="9525">
                 <a:solidFill>
                   <a:srgbClr val="000000"/>
                 </a:solidFill>
@@ -4734,7 +4734,7 @@
           <a:ln/>
           <a:extLst>
             <a:ext uri="{91240B29-F687-4f45-9708-019B960494DF}">
-              <a14:hiddenLine xmlns="" xmlns:a14="http://schemas.microsoft.com/office/drawing/2010/main" w="9525">
+              <a14:hiddenLine xmlns:a14="http://schemas.microsoft.com/office/drawing/2010/main" xmlns="" w="9525">
                 <a:solidFill>
                   <a:srgbClr val="000000"/>
                 </a:solidFill>
@@ -5170,7 +5170,7 @@
           <a:ln/>
           <a:extLst>
             <a:ext uri="{91240B29-F687-4f45-9708-019B960494DF}">
-              <a14:hiddenLine xmlns="" xmlns:a14="http://schemas.microsoft.com/office/drawing/2010/main" w="9525">
+              <a14:hiddenLine xmlns:a14="http://schemas.microsoft.com/office/drawing/2010/main" xmlns="" w="9525">
                 <a:solidFill>
                   <a:srgbClr val="000000"/>
                 </a:solidFill>
@@ -11776,6 +11776,42 @@
           </a:p>
         </p:txBody>
       </p:sp>
+      <p:sp>
+        <p:nvSpPr>
+          <p:cNvPr id="27" name="TextBox 26">
+            <a:extLst>
+              <a:ext uri="{FF2B5EF4-FFF2-40B4-BE49-F238E27FC236}">
+                <a16:creationId xmlns:a16="http://schemas.microsoft.com/office/drawing/2014/main" id="{4C430E3A-B062-C76C-91C9-160820C9C832}"/>
+              </a:ext>
+            </a:extLst>
+          </p:cNvPr>
+          <p:cNvSpPr txBox="1"/>
+          <p:nvPr/>
+        </p:nvSpPr>
+        <p:spPr>
+          <a:xfrm>
+            <a:off x="4291573" y="233173"/>
+            <a:ext cx="7651772" cy="276999"/>
+          </a:xfrm>
+          <a:prstGeom prst="rect">
+            <a:avLst/>
+          </a:prstGeom>
+          <a:noFill/>
+        </p:spPr>
+        <p:txBody>
+          <a:bodyPr wrap="square" rtlCol="0">
+            <a:spAutoFit/>
+          </a:bodyPr>
+          <a:lstStyle/>
+          <a:p>
+            <a:pPr algn="r"/>
+            <a:r>
+              <a:rPr lang="en-US" sz="1200"/>
+              <a:t>KVM 10.01.2026 | Julia Ihrenberger </a:t>
+            </a:r>
+          </a:p>
+        </p:txBody>
+      </p:sp>
     </p:spTree>
     <p:extLst>
       <p:ext uri="{BB962C8B-B14F-4D97-AF65-F5344CB8AC3E}">
